--- a/decks/maths-algebra/maths-algebra_ch1_machines-numbers.pptx
+++ b/decks/maths-algebra/maths-algebra_ch1_machines-numbers.pptx
@@ -122,48 +122,48 @@
   <p:extLst>
     <p:ext uri="{521415D9-36F7-43E2-AB2F-B90AF26B5E84}">
       <p14:sectionLst xmlns:p14="http://schemas.microsoft.com/office/powerpoint/2010/main">
-        <p14:section name="Opening" id="{a7d29ba5-77ca-b364-a6ee-3849515f0d9d}">
+        <p14:section name="Opening" id="{f90a270c-ae75-6a4c-e040-608491a80375}">
           <p14:sldIdLst>
             <p14:sldId id="256"/>
           </p14:sldIdLst>
         </p14:section>
-        <p14:section name="Gate" id="{3c6361ac-80d7-b8d1-d8ed-3a3d628f3607}">
+        <p14:section name="Gate" id="{049b5f81-57e7-4170-bc48-9743540716a8}">
           <p14:sldIdLst>
             <p14:sldId id="257"/>
             <p14:sldId id="258"/>
           </p14:sldIdLst>
         </p14:section>
-        <p14:section name="Pre-teach" id="{b3ed1700-e1e6-c3e4-a349-b1a07db3796b}">
+        <p14:section name="Pre-teach" id="{b2c7ae4d-ba91-374b-88a2-df24accb7bc5}">
           <p14:sldIdLst>
             <p14:sldId id="259"/>
             <p14:sldId id="260"/>
           </p14:sldIdLst>
         </p14:section>
-        <p14:section name="Read-along" id="{047c8898-a25e-25ae-0406-3c151fb6ed39}">
+        <p14:section name="Read-along" id="{376939db-ef5e-f40a-c418-205306117e84}">
           <p14:sldIdLst>
             <p14:sldId id="261"/>
             <p14:sldId id="262"/>
           </p14:sldIdLst>
         </p14:section>
-        <p14:section name="Teach" id="{3ffe944f-e5d1-e172-0495-5df4241878c0}">
+        <p14:section name="Teach" id="{3eb5e4e9-8009-7204-ba95-51e9d07ad6a2}">
           <p14:sldIdLst>
             <p14:sldId id="263"/>
             <p14:sldId id="264"/>
             <p14:sldId id="265"/>
           </p14:sldIdLst>
         </p14:section>
-        <p14:section name="Routes" id="{d1910d1d-dd59-b707-3ede-8287b721e2b4}">
+        <p14:section name="Routes" id="{6b1efad3-74ab-2ced-c6da-cc683ab1483a}">
           <p14:sldIdLst>
             <p14:sldId id="266"/>
             <p14:sldId id="267"/>
           </p14:sldIdLst>
         </p14:section>
-        <p14:section name="Close" id="{9b88d5f1-d1c0-eb87-52e0-bca63dc0577e}">
+        <p14:section name="Close" id="{5b3b94cf-7b77-fe5c-ef9c-86a08f6ef41a}">
           <p14:sldIdLst>
             <p14:sldId id="268"/>
           </p14:sldIdLst>
         </p14:section>
-        <p14:section name="Answers" id="{28916dc1-d97c-9aaf-f3a8-58b298dc09d1}">
+        <p14:section name="Answers" id="{79962e27-962e-df66-8e0b-cb29bfe23379}">
           <p14:sldIdLst>
             <p14:sldId id="269"/>
             <p14:sldId id="270"/>
@@ -9103,7 +9103,7 @@
                 <a:ea typeface="Calibri" pitchFamily="34" charset="-122"/>
                 <a:cs typeface="Calibri" pitchFamily="34" charset="-120"/>
               </a:rPr>
-              <a:t>Adding 4</a:t>
+              <a:t>Multiplying by 4</a:t>
             </a:r>
             <a:endParaRPr lang="en-US" sz="2400" dirty="0"/>
           </a:p>
@@ -9214,7 +9214,7 @@
                 <a:ea typeface="Calibri" pitchFamily="34" charset="-122"/>
                 <a:cs typeface="Calibri" pitchFamily="34" charset="-120"/>
               </a:rPr>
-              <a:t>Multiplying by 4</a:t>
+              <a:t>Adding 4</a:t>
             </a:r>
             <a:endParaRPr lang="en-US" sz="2400" dirty="0"/>
           </a:p>

--- a/decks/maths-algebra/maths-algebra_ch1_machines-numbers.pptx
+++ b/decks/maths-algebra/maths-algebra_ch1_machines-numbers.pptx
@@ -122,48 +122,48 @@
   <p:extLst>
     <p:ext uri="{521415D9-36F7-43E2-AB2F-B90AF26B5E84}">
       <p14:sectionLst xmlns:p14="http://schemas.microsoft.com/office/powerpoint/2010/main">
-        <p14:section name="Opening" id="{f90a270c-ae75-6a4c-e040-608491a80375}">
+        <p14:section name="Opening" id="{ec6d180e-e6da-2442-d01b-c5384941d741}">
           <p14:sldIdLst>
             <p14:sldId id="256"/>
           </p14:sldIdLst>
         </p14:section>
-        <p14:section name="Gate" id="{049b5f81-57e7-4170-bc48-9743540716a8}">
+        <p14:section name="Gate" id="{c4831709-5493-40b4-9e6a-ebc20eec29a4}">
           <p14:sldIdLst>
             <p14:sldId id="257"/>
             <p14:sldId id="258"/>
           </p14:sldIdLst>
         </p14:section>
-        <p14:section name="Pre-teach" id="{b2c7ae4d-ba91-374b-88a2-df24accb7bc5}">
+        <p14:section name="Pre-teach" id="{b5732b47-8504-2a1d-69c0-bd9711968123}">
           <p14:sldIdLst>
             <p14:sldId id="259"/>
             <p14:sldId id="260"/>
           </p14:sldIdLst>
         </p14:section>
-        <p14:section name="Read-along" id="{376939db-ef5e-f40a-c418-205306117e84}">
+        <p14:section name="Read-along" id="{77d6bbb9-27b3-36e8-0c98-801a6d766788}">
           <p14:sldIdLst>
             <p14:sldId id="261"/>
             <p14:sldId id="262"/>
           </p14:sldIdLst>
         </p14:section>
-        <p14:section name="Teach" id="{3eb5e4e9-8009-7204-ba95-51e9d07ad6a2}">
+        <p14:section name="Teach" id="{c74463d6-372d-b97d-518a-db1282a71513}">
           <p14:sldIdLst>
             <p14:sldId id="263"/>
             <p14:sldId id="264"/>
             <p14:sldId id="265"/>
           </p14:sldIdLst>
         </p14:section>
-        <p14:section name="Routes" id="{6b1efad3-74ab-2ced-c6da-cc683ab1483a}">
+        <p14:section name="Routes" id="{cd2d79b9-e749-38fe-5a68-790557b4322a}">
           <p14:sldIdLst>
             <p14:sldId id="266"/>
             <p14:sldId id="267"/>
           </p14:sldIdLst>
         </p14:section>
-        <p14:section name="Close" id="{5b3b94cf-7b77-fe5c-ef9c-86a08f6ef41a}">
+        <p14:section name="Close" id="{e8f74017-6178-8eb9-0d93-c6146a00b644}">
           <p14:sldIdLst>
             <p14:sldId id="268"/>
           </p14:sldIdLst>
         </p14:section>
-        <p14:section name="Answers" id="{79962e27-962e-df66-8e0b-cb29bfe23379}">
+        <p14:section name="Answers" id="{05518c49-0942-6370-1374-da5f3cd614bc}">
           <p14:sldIdLst>
             <p14:sldId id="269"/>
             <p14:sldId id="270"/>
